--- a/exports/pptx/lessons/middle-module-12-movement-of-sun/day-04-equinox.pptx
+++ b/exports/pptx/lessons/middle-module-12-movement-of-sun/day-04-equinox.pptx
@@ -4961,8 +4961,8 @@
         </p:nvSpPr>
         <p:spPr>
           <a:xfrm>
-            <a:off x="634901" y="3856732"/>
-            <a:ext cx="8102798" cy="281880"/>
+            <a:off x="406301" y="2942779"/>
+            <a:ext cx="8498026" cy="213271"/>
           </a:xfrm>
           <a:prstGeom prst="rect">
             <a:avLst/>
@@ -4974,6 +4974,54 @@
           <a:bodyPr wrap="square" lIns="0" tIns="0" rIns="0" bIns="0" rtlCol="0" anchor="t"/>
           <a:lstStyle/>
           <a:p>
+            <a:pPr algn="l" indent="0" marL="0">
+              <a:lnSpc>
+                <a:spcPts val="1680"/>
+              </a:lnSpc>
+              <a:spcBef>
+                <a:spcPts val="300"/>
+              </a:spcBef>
+              <a:spcAft>
+                <a:spcPts val="300"/>
+              </a:spcAft>
+              <a:buNone/>
+            </a:pPr>
+            <a:r>
+              <a:rPr lang="en-US" sz="1200" i="1" dirty="0">
+                <a:solidFill>
+                  <a:srgbClr val="1C2833"/>
+                </a:solidFill>
+                <a:latin typeface="Arial" pitchFamily="34" charset="0"/>
+                <a:ea typeface="Arial" pitchFamily="34" charset="-122"/>
+                <a:cs typeface="Arial" pitchFamily="34" charset="-120"/>
+              </a:rPr>
+              <a:t>Each row: Date · Name · What happens after.</a:t>
+            </a:r>
+            <a:endParaRPr lang="en-US" sz="1200" dirty="0"/>
+          </a:p>
+        </p:txBody>
+      </p:sp>
+      <p:sp>
+        <p:nvSpPr>
+          <p:cNvPr id="9" name="Text 7"/>
+          <p:cNvSpPr/>
+          <p:nvPr/>
+        </p:nvSpPr>
+        <p:spPr>
+          <a:xfrm>
+            <a:off x="634901" y="3244900"/>
+            <a:ext cx="8102798" cy="731341"/>
+          </a:xfrm>
+          <a:prstGeom prst="rect">
+            <a:avLst/>
+          </a:prstGeom>
+          <a:noFill/>
+          <a:ln/>
+        </p:spPr>
+        <p:txBody>
+          <a:bodyPr wrap="square" lIns="0" tIns="0" rIns="0" bIns="0" rtlCol="0" anchor="t"/>
+          <a:lstStyle/>
+          <a:p>
             <a:pPr algn="l" marL="342900" indent="-342900">
               <a:lnSpc>
                 <a:spcPts val="1620"/>
@@ -4993,6 +5041,276 @@
                 <a:ea typeface="Arial" pitchFamily="34" charset="-122"/>
                 <a:cs typeface="Arial" pitchFamily="34" charset="-120"/>
               </a:rPr>
+              <a:t>~21 March</a:t>
+            </a:r>
+            <a:pPr algn="l" indent="0" marL="0">
+              <a:lnSpc>
+                <a:spcPts val="1620"/>
+              </a:lnSpc>
+              <a:spcAft>
+                <a:spcPts val="300"/>
+              </a:spcAft>
+              <a:buNone/>
+            </a:pPr>
+            <a:r>
+              <a:rPr lang="en-US" sz="1200" dirty="0">
+                <a:solidFill>
+                  <a:srgbClr val="1C2833"/>
+                </a:solidFill>
+                <a:latin typeface="Arial" pitchFamily="34" charset="0"/>
+                <a:ea typeface="Arial" pitchFamily="34" charset="-122"/>
+                <a:cs typeface="Arial" pitchFamily="34" charset="-120"/>
+              </a:rPr>
+              <a:t> — </a:t>
+            </a:r>
+            <a:pPr algn="l" indent="0" marL="0">
+              <a:lnSpc>
+                <a:spcPts val="1620"/>
+              </a:lnSpc>
+              <a:spcAft>
+                <a:spcPts val="300"/>
+              </a:spcAft>
+              <a:buNone/>
+            </a:pPr>
+            <a:r>
+              <a:rPr lang="en-US" sz="1200" b="1" dirty="0">
+                <a:solidFill>
+                  <a:srgbClr val="1C2833"/>
+                </a:solidFill>
+                <a:latin typeface="Arial" pitchFamily="34" charset="0"/>
+                <a:ea typeface="Arial" pitchFamily="34" charset="-122"/>
+                <a:cs typeface="Arial" pitchFamily="34" charset="-120"/>
+              </a:rPr>
+              <a:t>Vernal / spring equinox</a:t>
+            </a:r>
+            <a:pPr algn="l" indent="0" marL="0">
+              <a:lnSpc>
+                <a:spcPts val="1620"/>
+              </a:lnSpc>
+              <a:spcAft>
+                <a:spcPts val="300"/>
+              </a:spcAft>
+              <a:buNone/>
+            </a:pPr>
+            <a:r>
+              <a:rPr lang="en-US" sz="1200" dirty="0">
+                <a:solidFill>
+                  <a:srgbClr val="1C2833"/>
+                </a:solidFill>
+                <a:latin typeface="Arial" pitchFamily="34" charset="0"/>
+                <a:ea typeface="Arial" pitchFamily="34" charset="-122"/>
+                <a:cs typeface="Arial" pitchFamily="34" charset="-120"/>
+              </a:rPr>
+              <a:t> (</a:t>
+            </a:r>
+            <a:pPr algn="l" indent="0" marL="0">
+              <a:lnSpc>
+                <a:spcPts val="1620"/>
+              </a:lnSpc>
+              <a:spcAft>
+                <a:spcPts val="300"/>
+              </a:spcAft>
+              <a:buNone/>
+            </a:pPr>
+            <a:r>
+              <a:rPr lang="en-US" sz="1200" i="1" dirty="0">
+                <a:solidFill>
+                  <a:srgbClr val="1C2833"/>
+                </a:solidFill>
+                <a:latin typeface="Arial" pitchFamily="34" charset="0"/>
+                <a:ea typeface="Arial" pitchFamily="34" charset="-122"/>
+                <a:cs typeface="Arial" pitchFamily="34" charset="-120"/>
+              </a:rPr>
+              <a:t>vasanta-viṣuva</a:t>
+            </a:r>
+            <a:pPr algn="l" indent="0" marL="0">
+              <a:lnSpc>
+                <a:spcPts val="1620"/>
+              </a:lnSpc>
+              <a:spcAft>
+                <a:spcPts val="300"/>
+              </a:spcAft>
+              <a:buNone/>
+            </a:pPr>
+            <a:r>
+              <a:rPr lang="en-US" sz="1200" dirty="0">
+                <a:solidFill>
+                  <a:srgbClr val="1C2833"/>
+                </a:solidFill>
+                <a:latin typeface="Arial" pitchFamily="34" charset="0"/>
+                <a:ea typeface="Arial" pitchFamily="34" charset="-122"/>
+                <a:cs typeface="Arial" pitchFamily="34" charset="-120"/>
+              </a:rPr>
+              <a:t>) · Days get longer in N hemisphere → spring → summer</a:t>
+            </a:r>
+            <a:endParaRPr lang="en-US" sz="1200" dirty="0"/>
+          </a:p>
+          <a:p>
+            <a:pPr algn="l" marL="342900" indent="-342900">
+              <a:lnSpc>
+                <a:spcPts val="1620"/>
+              </a:lnSpc>
+              <a:spcAft>
+                <a:spcPts val="300"/>
+              </a:spcAft>
+              <a:buSzPct val="100000"/>
+              <a:buChar char="•"/>
+            </a:pPr>
+            <a:r>
+              <a:rPr lang="en-US" sz="1200" b="1" dirty="0">
+                <a:solidFill>
+                  <a:srgbClr val="1C2833"/>
+                </a:solidFill>
+                <a:latin typeface="Arial" pitchFamily="34" charset="0"/>
+                <a:ea typeface="Arial" pitchFamily="34" charset="-122"/>
+                <a:cs typeface="Arial" pitchFamily="34" charset="-120"/>
+              </a:rPr>
+              <a:t>~23 September</a:t>
+            </a:r>
+            <a:pPr algn="l" indent="0" marL="0">
+              <a:lnSpc>
+                <a:spcPts val="1620"/>
+              </a:lnSpc>
+              <a:spcAft>
+                <a:spcPts val="300"/>
+              </a:spcAft>
+              <a:buNone/>
+            </a:pPr>
+            <a:r>
+              <a:rPr lang="en-US" sz="1200" dirty="0">
+                <a:solidFill>
+                  <a:srgbClr val="1C2833"/>
+                </a:solidFill>
+                <a:latin typeface="Arial" pitchFamily="34" charset="0"/>
+                <a:ea typeface="Arial" pitchFamily="34" charset="-122"/>
+                <a:cs typeface="Arial" pitchFamily="34" charset="-120"/>
+              </a:rPr>
+              <a:t> — </a:t>
+            </a:r>
+            <a:pPr algn="l" indent="0" marL="0">
+              <a:lnSpc>
+                <a:spcPts val="1620"/>
+              </a:lnSpc>
+              <a:spcAft>
+                <a:spcPts val="300"/>
+              </a:spcAft>
+              <a:buNone/>
+            </a:pPr>
+            <a:r>
+              <a:rPr lang="en-US" sz="1200" b="1" dirty="0">
+                <a:solidFill>
+                  <a:srgbClr val="1C2833"/>
+                </a:solidFill>
+                <a:latin typeface="Arial" pitchFamily="34" charset="0"/>
+                <a:ea typeface="Arial" pitchFamily="34" charset="-122"/>
+                <a:cs typeface="Arial" pitchFamily="34" charset="-120"/>
+              </a:rPr>
+              <a:t>Autumnal / autumn equinox</a:t>
+            </a:r>
+            <a:pPr algn="l" indent="0" marL="0">
+              <a:lnSpc>
+                <a:spcPts val="1620"/>
+              </a:lnSpc>
+              <a:spcAft>
+                <a:spcPts val="300"/>
+              </a:spcAft>
+              <a:buNone/>
+            </a:pPr>
+            <a:r>
+              <a:rPr lang="en-US" sz="1200" dirty="0">
+                <a:solidFill>
+                  <a:srgbClr val="1C2833"/>
+                </a:solidFill>
+                <a:latin typeface="Arial" pitchFamily="34" charset="0"/>
+                <a:ea typeface="Arial" pitchFamily="34" charset="-122"/>
+                <a:cs typeface="Arial" pitchFamily="34" charset="-120"/>
+              </a:rPr>
+              <a:t> (</a:t>
+            </a:r>
+            <a:pPr algn="l" indent="0" marL="0">
+              <a:lnSpc>
+                <a:spcPts val="1620"/>
+              </a:lnSpc>
+              <a:spcAft>
+                <a:spcPts val="300"/>
+              </a:spcAft>
+              <a:buNone/>
+            </a:pPr>
+            <a:r>
+              <a:rPr lang="en-US" sz="1200" i="1" dirty="0">
+                <a:solidFill>
+                  <a:srgbClr val="1C2833"/>
+                </a:solidFill>
+                <a:latin typeface="Arial" pitchFamily="34" charset="0"/>
+                <a:ea typeface="Arial" pitchFamily="34" charset="-122"/>
+                <a:cs typeface="Arial" pitchFamily="34" charset="-120"/>
+              </a:rPr>
+              <a:t>śarad-viṣuva</a:t>
+            </a:r>
+            <a:pPr algn="l" indent="0" marL="0">
+              <a:lnSpc>
+                <a:spcPts val="1620"/>
+              </a:lnSpc>
+              <a:spcAft>
+                <a:spcPts val="300"/>
+              </a:spcAft>
+              <a:buNone/>
+            </a:pPr>
+            <a:r>
+              <a:rPr lang="en-US" sz="1200" dirty="0">
+                <a:solidFill>
+                  <a:srgbClr val="1C2833"/>
+                </a:solidFill>
+                <a:latin typeface="Arial" pitchFamily="34" charset="0"/>
+                <a:ea typeface="Arial" pitchFamily="34" charset="-122"/>
+                <a:cs typeface="Arial" pitchFamily="34" charset="-120"/>
+              </a:rPr>
+              <a:t>) · Days get shorter in N hemisphere → autumn → winter</a:t>
+            </a:r>
+            <a:endParaRPr lang="en-US" sz="1200" dirty="0"/>
+          </a:p>
+        </p:txBody>
+      </p:sp>
+      <p:sp>
+        <p:nvSpPr>
+          <p:cNvPr id="10" name="Text 8"/>
+          <p:cNvSpPr/>
+          <p:nvPr/>
+        </p:nvSpPr>
+        <p:spPr>
+          <a:xfrm>
+            <a:off x="634901" y="4077742"/>
+            <a:ext cx="8102798" cy="281880"/>
+          </a:xfrm>
+          <a:prstGeom prst="rect">
+            <a:avLst/>
+          </a:prstGeom>
+          <a:noFill/>
+          <a:ln/>
+        </p:spPr>
+        <p:txBody>
+          <a:bodyPr wrap="square" lIns="0" tIns="0" rIns="0" bIns="0" rtlCol="0" anchor="t"/>
+          <a:lstStyle/>
+          <a:p>
+            <a:pPr algn="l" marL="342900" indent="-342900">
+              <a:lnSpc>
+                <a:spcPts val="1620"/>
+              </a:lnSpc>
+              <a:spcAft>
+                <a:spcPts val="300"/>
+              </a:spcAft>
+              <a:buSzPct val="100000"/>
+              <a:buChar char="•"/>
+            </a:pPr>
+            <a:r>
+              <a:rPr lang="en-US" sz="1200" b="1" dirty="0">
+                <a:solidFill>
+                  <a:srgbClr val="1C2833"/>
+                </a:solidFill>
+                <a:latin typeface="Arial" pitchFamily="34" charset="0"/>
+                <a:ea typeface="Arial" pitchFamily="34" charset="-122"/>
+                <a:cs typeface="Arial" pitchFamily="34" charset="-120"/>
+              </a:rPr>
               <a:t>Two equinoxes + two solstices = four turning points of the year.</a:t>
             </a:r>
             <a:pPr algn="l" indent="0" marL="0">
@@ -5021,13 +5339,13 @@
       </p:sp>
       <p:sp>
         <p:nvSpPr>
-          <p:cNvPr id="9" name="Text 7"/>
-          <p:cNvSpPr/>
-          <p:nvPr/>
-        </p:nvSpPr>
-        <p:spPr>
-          <a:xfrm>
-            <a:off x="406301" y="4240113"/>
+          <p:cNvPr id="11" name="Text 9"/>
+          <p:cNvSpPr/>
+          <p:nvPr/>
+        </p:nvSpPr>
+        <p:spPr>
+          <a:xfrm>
+            <a:off x="406301" y="4461123"/>
             <a:ext cx="8331398" cy="2523381"/>
           </a:xfrm>
           <a:prstGeom prst="rect">
@@ -5051,13 +5369,13 @@
       </p:sp>
       <p:sp>
         <p:nvSpPr>
-          <p:cNvPr id="10" name="Shape 8"/>
-          <p:cNvSpPr/>
-          <p:nvPr/>
-        </p:nvSpPr>
-        <p:spPr>
-          <a:xfrm>
-            <a:off x="430113" y="4240113"/>
+          <p:cNvPr id="12" name="Shape 10"/>
+          <p:cNvSpPr/>
+          <p:nvPr/>
+        </p:nvSpPr>
+        <p:spPr>
+          <a:xfrm>
+            <a:off x="430113" y="4461123"/>
             <a:ext cx="0" cy="2523381"/>
           </a:xfrm>
           <a:prstGeom prst="line">
@@ -5074,13 +5392,13 @@
       </p:sp>
       <p:sp>
         <p:nvSpPr>
-          <p:cNvPr id="11" name="Text 9"/>
-          <p:cNvSpPr/>
-          <p:nvPr/>
-        </p:nvSpPr>
-        <p:spPr>
-          <a:xfrm>
-            <a:off x="631627" y="4367064"/>
+          <p:cNvPr id="13" name="Text 11"/>
+          <p:cNvSpPr/>
+          <p:nvPr/>
+        </p:nvSpPr>
+        <p:spPr>
+          <a:xfrm>
+            <a:off x="631627" y="4588073"/>
             <a:ext cx="8086939" cy="174575"/>
           </a:xfrm>
           <a:prstGeom prst="rect">
@@ -5116,13 +5434,13 @@
       </p:sp>
       <p:sp>
         <p:nvSpPr>
-          <p:cNvPr id="12" name="Text 10"/>
-          <p:cNvSpPr/>
-          <p:nvPr/>
-        </p:nvSpPr>
-        <p:spPr>
-          <a:xfrm>
-            <a:off x="631627" y="4541639"/>
+          <p:cNvPr id="14" name="Text 12"/>
+          <p:cNvSpPr/>
+          <p:nvPr/>
+        </p:nvSpPr>
+        <p:spPr>
+          <a:xfrm>
+            <a:off x="631627" y="4762649"/>
             <a:ext cx="8086939" cy="174575"/>
           </a:xfrm>
           <a:prstGeom prst="rect">
@@ -5158,13 +5476,13 @@
       </p:sp>
       <p:sp>
         <p:nvSpPr>
-          <p:cNvPr id="13" name="Text 11"/>
-          <p:cNvSpPr/>
-          <p:nvPr/>
-        </p:nvSpPr>
-        <p:spPr>
-          <a:xfrm>
-            <a:off x="631627" y="4716214"/>
+          <p:cNvPr id="15" name="Text 13"/>
+          <p:cNvSpPr/>
+          <p:nvPr/>
+        </p:nvSpPr>
+        <p:spPr>
+          <a:xfrm>
+            <a:off x="631627" y="4937224"/>
             <a:ext cx="8086939" cy="174575"/>
           </a:xfrm>
           <a:prstGeom prst="rect">
@@ -5200,13 +5518,13 @@
       </p:sp>
       <p:sp>
         <p:nvSpPr>
-          <p:cNvPr id="14" name="Text 12"/>
-          <p:cNvSpPr/>
-          <p:nvPr/>
-        </p:nvSpPr>
-        <p:spPr>
-          <a:xfrm>
-            <a:off x="631627" y="4890790"/>
+          <p:cNvPr id="16" name="Text 14"/>
+          <p:cNvSpPr/>
+          <p:nvPr/>
+        </p:nvSpPr>
+        <p:spPr>
+          <a:xfrm>
+            <a:off x="631627" y="5111800"/>
             <a:ext cx="8086939" cy="174575"/>
           </a:xfrm>
           <a:prstGeom prst="rect">
@@ -5242,13 +5560,13 @@
       </p:sp>
       <p:sp>
         <p:nvSpPr>
-          <p:cNvPr id="15" name="Text 13"/>
-          <p:cNvSpPr/>
-          <p:nvPr/>
-        </p:nvSpPr>
-        <p:spPr>
-          <a:xfrm>
-            <a:off x="631627" y="5065365"/>
+          <p:cNvPr id="17" name="Text 15"/>
+          <p:cNvSpPr/>
+          <p:nvPr/>
+        </p:nvSpPr>
+        <p:spPr>
+          <a:xfrm>
+            <a:off x="631627" y="5286375"/>
             <a:ext cx="8086939" cy="174575"/>
           </a:xfrm>
           <a:prstGeom prst="rect">
@@ -5284,13 +5602,13 @@
       </p:sp>
       <p:sp>
         <p:nvSpPr>
-          <p:cNvPr id="16" name="Text 14"/>
-          <p:cNvSpPr/>
-          <p:nvPr/>
-        </p:nvSpPr>
-        <p:spPr>
-          <a:xfrm>
-            <a:off x="631627" y="5239941"/>
+          <p:cNvPr id="18" name="Text 16"/>
+          <p:cNvSpPr/>
+          <p:nvPr/>
+        </p:nvSpPr>
+        <p:spPr>
+          <a:xfrm>
+            <a:off x="631627" y="5460950"/>
             <a:ext cx="8086939" cy="174575"/>
           </a:xfrm>
           <a:prstGeom prst="rect">
@@ -5326,13 +5644,13 @@
       </p:sp>
       <p:sp>
         <p:nvSpPr>
-          <p:cNvPr id="17" name="Text 15"/>
-          <p:cNvSpPr/>
-          <p:nvPr/>
-        </p:nvSpPr>
-        <p:spPr>
-          <a:xfrm>
-            <a:off x="631627" y="5414516"/>
+          <p:cNvPr id="19" name="Text 17"/>
+          <p:cNvSpPr/>
+          <p:nvPr/>
+        </p:nvSpPr>
+        <p:spPr>
+          <a:xfrm>
+            <a:off x="631627" y="5635526"/>
             <a:ext cx="8086939" cy="174575"/>
           </a:xfrm>
           <a:prstGeom prst="rect">
@@ -5368,13 +5686,13 @@
       </p:sp>
       <p:sp>
         <p:nvSpPr>
-          <p:cNvPr id="18" name="Text 16"/>
-          <p:cNvSpPr/>
-          <p:nvPr/>
-        </p:nvSpPr>
-        <p:spPr>
-          <a:xfrm>
-            <a:off x="631627" y="5589091"/>
+          <p:cNvPr id="20" name="Text 18"/>
+          <p:cNvSpPr/>
+          <p:nvPr/>
+        </p:nvSpPr>
+        <p:spPr>
+          <a:xfrm>
+            <a:off x="631627" y="5810101"/>
             <a:ext cx="8086939" cy="174575"/>
           </a:xfrm>
           <a:prstGeom prst="rect">
@@ -5410,13 +5728,13 @@
       </p:sp>
       <p:sp>
         <p:nvSpPr>
-          <p:cNvPr id="19" name="Text 17"/>
-          <p:cNvSpPr/>
-          <p:nvPr/>
-        </p:nvSpPr>
-        <p:spPr>
-          <a:xfrm>
-            <a:off x="631627" y="5763667"/>
+          <p:cNvPr id="21" name="Text 19"/>
+          <p:cNvSpPr/>
+          <p:nvPr/>
+        </p:nvSpPr>
+        <p:spPr>
+          <a:xfrm>
+            <a:off x="631627" y="5984677"/>
             <a:ext cx="8086939" cy="174575"/>
           </a:xfrm>
           <a:prstGeom prst="rect">
@@ -5452,13 +5770,13 @@
       </p:sp>
       <p:sp>
         <p:nvSpPr>
-          <p:cNvPr id="20" name="Text 18"/>
-          <p:cNvSpPr/>
-          <p:nvPr/>
-        </p:nvSpPr>
-        <p:spPr>
-          <a:xfrm>
-            <a:off x="631627" y="5938242"/>
+          <p:cNvPr id="22" name="Text 20"/>
+          <p:cNvSpPr/>
+          <p:nvPr/>
+        </p:nvSpPr>
+        <p:spPr>
+          <a:xfrm>
+            <a:off x="631627" y="6159252"/>
             <a:ext cx="8086939" cy="174575"/>
           </a:xfrm>
           <a:prstGeom prst="rect">
@@ -5494,13 +5812,13 @@
       </p:sp>
       <p:sp>
         <p:nvSpPr>
-          <p:cNvPr id="21" name="Text 19"/>
-          <p:cNvSpPr/>
-          <p:nvPr/>
-        </p:nvSpPr>
-        <p:spPr>
-          <a:xfrm>
-            <a:off x="631627" y="6112818"/>
+          <p:cNvPr id="23" name="Text 21"/>
+          <p:cNvSpPr/>
+          <p:nvPr/>
+        </p:nvSpPr>
+        <p:spPr>
+          <a:xfrm>
+            <a:off x="631627" y="6333827"/>
             <a:ext cx="8086939" cy="174575"/>
           </a:xfrm>
           <a:prstGeom prst="rect">
@@ -5536,13 +5854,13 @@
       </p:sp>
       <p:sp>
         <p:nvSpPr>
-          <p:cNvPr id="22" name="Text 20"/>
-          <p:cNvSpPr/>
-          <p:nvPr/>
-        </p:nvSpPr>
-        <p:spPr>
-          <a:xfrm>
-            <a:off x="631627" y="6287393"/>
+          <p:cNvPr id="24" name="Text 22"/>
+          <p:cNvSpPr/>
+          <p:nvPr/>
+        </p:nvSpPr>
+        <p:spPr>
+          <a:xfrm>
+            <a:off x="631627" y="6508403"/>
             <a:ext cx="8086939" cy="174575"/>
           </a:xfrm>
           <a:prstGeom prst="rect">
@@ -5578,13 +5896,13 @@
       </p:sp>
       <p:sp>
         <p:nvSpPr>
-          <p:cNvPr id="23" name="Text 21"/>
-          <p:cNvSpPr/>
-          <p:nvPr/>
-        </p:nvSpPr>
-        <p:spPr>
-          <a:xfrm>
-            <a:off x="631627" y="6461968"/>
+          <p:cNvPr id="25" name="Text 23"/>
+          <p:cNvSpPr/>
+          <p:nvPr/>
+        </p:nvSpPr>
+        <p:spPr>
+          <a:xfrm>
+            <a:off x="631627" y="6682978"/>
             <a:ext cx="8086939" cy="174575"/>
           </a:xfrm>
           <a:prstGeom prst="rect">
@@ -5620,13 +5938,13 @@
       </p:sp>
       <p:sp>
         <p:nvSpPr>
-          <p:cNvPr id="24" name="Text 22"/>
-          <p:cNvSpPr/>
-          <p:nvPr/>
-        </p:nvSpPr>
-        <p:spPr>
-          <a:xfrm>
-            <a:off x="634901" y="6864995"/>
+          <p:cNvPr id="26" name="Text 24"/>
+          <p:cNvSpPr/>
+          <p:nvPr/>
+        </p:nvSpPr>
+        <p:spPr>
+          <a:xfrm>
+            <a:off x="634901" y="7086005"/>
             <a:ext cx="8102798" cy="487561"/>
           </a:xfrm>
           <a:prstGeom prst="rect">
@@ -5686,13 +6004,13 @@
       </p:sp>
       <p:sp>
         <p:nvSpPr>
-          <p:cNvPr id="25" name="Text 23"/>
-          <p:cNvSpPr/>
-          <p:nvPr/>
-        </p:nvSpPr>
-        <p:spPr>
-          <a:xfrm>
-            <a:off x="406301" y="7517606"/>
+          <p:cNvPr id="27" name="Text 25"/>
+          <p:cNvSpPr/>
+          <p:nvPr/>
+        </p:nvSpPr>
+        <p:spPr>
+          <a:xfrm>
+            <a:off x="406301" y="7738616"/>
             <a:ext cx="8498026" cy="213271"/>
           </a:xfrm>
           <a:prstGeom prst="rect">
@@ -6016,7 +6334,7 @@
         </p:nvSpPr>
         <p:spPr>
           <a:xfrm>
-            <a:off x="406301" y="5612606"/>
+            <a:off x="406301" y="2077045"/>
             <a:ext cx="8498026" cy="213271"/>
           </a:xfrm>
           <a:prstGeom prst="rect">
@@ -6042,15 +6360,15 @@
               <a:buNone/>
             </a:pPr>
             <a:r>
-              <a:rPr lang="en-US" sz="1200" dirty="0">
-                <a:solidFill>
-                  <a:srgbClr val="1C2833"/>
-                </a:solidFill>
-                <a:latin typeface="Arial" pitchFamily="34" charset="0"/>
-                <a:ea typeface="Arial" pitchFamily="34" charset="-122"/>
-                <a:cs typeface="Arial" pitchFamily="34" charset="-120"/>
-              </a:rPr>
-              <a:t>Students plot the points, connect them, and mark:</a:t>
+              <a:rPr lang="en-US" sz="1200" i="1" dirty="0">
+                <a:solidFill>
+                  <a:srgbClr val="1C2833"/>
+                </a:solidFill>
+                <a:latin typeface="Arial" pitchFamily="34" charset="0"/>
+                <a:ea typeface="Arial" pitchFamily="34" charset="-122"/>
+                <a:cs typeface="Arial" pitchFamily="34" charset="-120"/>
+              </a:rPr>
+              <a:t>Each row: Month · Day length (Delhi).</a:t>
             </a:r>
             <a:endParaRPr lang="en-US" sz="1200" dirty="0"/>
           </a:p>
@@ -6064,8 +6382,8 @@
         </p:nvSpPr>
         <p:spPr>
           <a:xfrm>
-            <a:off x="406301" y="5902077"/>
-            <a:ext cx="8498026" cy="426541"/>
+            <a:off x="634901" y="2379166"/>
+            <a:ext cx="8102798" cy="2963466"/>
           </a:xfrm>
           <a:prstGeom prst="rect">
             <a:avLst/>
@@ -6077,13 +6395,31 @@
           <a:bodyPr wrap="square" lIns="0" tIns="0" rIns="0" bIns="0" rtlCol="0" anchor="t"/>
           <a:lstStyle/>
           <a:p>
-            <a:pPr algn="l" indent="0" marL="0">
-              <a:lnSpc>
-                <a:spcPts val="1680"/>
-              </a:lnSpc>
-              <a:spcBef>
-                <a:spcPts val="300"/>
-              </a:spcBef>
+            <a:pPr algn="l" marL="342900" indent="-342900">
+              <a:lnSpc>
+                <a:spcPts val="1620"/>
+              </a:lnSpc>
+              <a:spcAft>
+                <a:spcPts val="300"/>
+              </a:spcAft>
+              <a:buSzPct val="100000"/>
+              <a:buChar char="•"/>
+            </a:pPr>
+            <a:r>
+              <a:rPr lang="en-US" sz="1200" b="1" dirty="0">
+                <a:solidFill>
+                  <a:srgbClr val="1C2833"/>
+                </a:solidFill>
+                <a:latin typeface="Arial" pitchFamily="34" charset="0"/>
+                <a:ea typeface="Arial" pitchFamily="34" charset="-122"/>
+                <a:cs typeface="Arial" pitchFamily="34" charset="-120"/>
+              </a:rPr>
+              <a:t>Jan</a:t>
+            </a:r>
+            <a:pPr algn="l" indent="0" marL="0">
+              <a:lnSpc>
+                <a:spcPts val="1620"/>
+              </a:lnSpc>
               <a:spcAft>
                 <a:spcPts val="300"/>
               </a:spcAft>
@@ -6098,19 +6434,20 @@
                 <a:ea typeface="Arial" pitchFamily="34" charset="-122"/>
                 <a:cs typeface="Arial" pitchFamily="34" charset="-120"/>
               </a:rPr>
-              <a:t>– The </a:t>
-            </a:r>
-            <a:pPr algn="l" indent="0" marL="0">
-              <a:lnSpc>
-                <a:spcPts val="1680"/>
-              </a:lnSpc>
-              <a:spcBef>
-                <a:spcPts val="300"/>
-              </a:spcBef>
-              <a:spcAft>
-                <a:spcPts val="300"/>
-              </a:spcAft>
-              <a:buNone/>
+              <a:t> — ~10 h 25 min</a:t>
+            </a:r>
+            <a:endParaRPr lang="en-US" sz="1200" dirty="0"/>
+          </a:p>
+          <a:p>
+            <a:pPr algn="l" marL="342900" indent="-342900">
+              <a:lnSpc>
+                <a:spcPts val="1620"/>
+              </a:lnSpc>
+              <a:spcAft>
+                <a:spcPts val="300"/>
+              </a:spcAft>
+              <a:buSzPct val="100000"/>
+              <a:buChar char="•"/>
             </a:pPr>
             <a:r>
               <a:rPr lang="en-US" sz="1200" b="1" dirty="0">
@@ -6121,15 +6458,12 @@
                 <a:ea typeface="Arial" pitchFamily="34" charset="-122"/>
                 <a:cs typeface="Arial" pitchFamily="34" charset="-120"/>
               </a:rPr>
-              <a:t>two highest points</a:t>
-            </a:r>
-            <a:pPr algn="l" indent="0" marL="0">
-              <a:lnSpc>
-                <a:spcPts val="1680"/>
-              </a:lnSpc>
-              <a:spcBef>
-                <a:spcPts val="300"/>
-              </a:spcBef>
+              <a:t>Feb</a:t>
+            </a:r>
+            <a:pPr algn="l" indent="0" marL="0">
+              <a:lnSpc>
+                <a:spcPts val="1620"/>
+              </a:lnSpc>
               <a:spcAft>
                 <a:spcPts val="300"/>
               </a:spcAft>
@@ -6144,19 +6478,20 @@
                 <a:ea typeface="Arial" pitchFamily="34" charset="-122"/>
                 <a:cs typeface="Arial" pitchFamily="34" charset="-120"/>
               </a:rPr>
-              <a:t> (close together in June) — summer solstice. – The </a:t>
-            </a:r>
-            <a:pPr algn="l" indent="0" marL="0">
-              <a:lnSpc>
-                <a:spcPts val="1680"/>
-              </a:lnSpc>
-              <a:spcBef>
-                <a:spcPts val="300"/>
-              </a:spcBef>
-              <a:spcAft>
-                <a:spcPts val="300"/>
-              </a:spcAft>
-              <a:buNone/>
+              <a:t> — ~11 h 05 min</a:t>
+            </a:r>
+            <a:endParaRPr lang="en-US" sz="1200" dirty="0"/>
+          </a:p>
+          <a:p>
+            <a:pPr algn="l" marL="342900" indent="-342900">
+              <a:lnSpc>
+                <a:spcPts val="1620"/>
+              </a:lnSpc>
+              <a:spcAft>
+                <a:spcPts val="300"/>
+              </a:spcAft>
+              <a:buSzPct val="100000"/>
+              <a:buChar char="•"/>
             </a:pPr>
             <a:r>
               <a:rPr lang="en-US" sz="1200" b="1" dirty="0">
@@ -6167,15 +6502,12 @@
                 <a:ea typeface="Arial" pitchFamily="34" charset="-122"/>
                 <a:cs typeface="Arial" pitchFamily="34" charset="-120"/>
               </a:rPr>
-              <a:t>two lowest points</a:t>
-            </a:r>
-            <a:pPr algn="l" indent="0" marL="0">
-              <a:lnSpc>
-                <a:spcPts val="1680"/>
-              </a:lnSpc>
-              <a:spcBef>
-                <a:spcPts val="300"/>
-              </a:spcBef>
+              <a:t>Mar</a:t>
+            </a:r>
+            <a:pPr algn="l" indent="0" marL="0">
+              <a:lnSpc>
+                <a:spcPts val="1620"/>
+              </a:lnSpc>
               <a:spcAft>
                 <a:spcPts val="300"/>
               </a:spcAft>
@@ -6190,19 +6522,20 @@
                 <a:ea typeface="Arial" pitchFamily="34" charset="-122"/>
                 <a:cs typeface="Arial" pitchFamily="34" charset="-120"/>
               </a:rPr>
-              <a:t> (close together in December) — winter solstice. – The </a:t>
-            </a:r>
-            <a:pPr algn="l" indent="0" marL="0">
-              <a:lnSpc>
-                <a:spcPts val="1680"/>
-              </a:lnSpc>
-              <a:spcBef>
-                <a:spcPts val="300"/>
-              </a:spcBef>
-              <a:spcAft>
-                <a:spcPts val="300"/>
-              </a:spcAft>
-              <a:buNone/>
+              <a:t> — ~12 h 00 min</a:t>
+            </a:r>
+            <a:endParaRPr lang="en-US" sz="1200" dirty="0"/>
+          </a:p>
+          <a:p>
+            <a:pPr algn="l" marL="342900" indent="-342900">
+              <a:lnSpc>
+                <a:spcPts val="1620"/>
+              </a:lnSpc>
+              <a:spcAft>
+                <a:spcPts val="300"/>
+              </a:spcAft>
+              <a:buSzPct val="100000"/>
+              <a:buChar char="•"/>
             </a:pPr>
             <a:r>
               <a:rPr lang="en-US" sz="1200" b="1" dirty="0">
@@ -6213,15 +6546,12 @@
                 <a:ea typeface="Arial" pitchFamily="34" charset="-122"/>
                 <a:cs typeface="Arial" pitchFamily="34" charset="-120"/>
               </a:rPr>
-              <a:t>two crossings of the 12-hour line</a:t>
-            </a:r>
-            <a:pPr algn="l" indent="0" marL="0">
-              <a:lnSpc>
-                <a:spcPts val="1680"/>
-              </a:lnSpc>
-              <a:spcBef>
-                <a:spcPts val="300"/>
-              </a:spcBef>
+              <a:t>Apr</a:t>
+            </a:r>
+            <a:pPr algn="l" indent="0" marL="0">
+              <a:lnSpc>
+                <a:spcPts val="1620"/>
+              </a:lnSpc>
               <a:spcAft>
                 <a:spcPts val="300"/>
               </a:spcAft>
@@ -6236,10 +6566,362 @@
                 <a:ea typeface="Arial" pitchFamily="34" charset="-122"/>
                 <a:cs typeface="Arial" pitchFamily="34" charset="-120"/>
               </a:rPr>
-              <a:t> — the equinoxes.</a:t>
+              <a:t> — ~12 h 50 min</a:t>
             </a:r>
             <a:endParaRPr lang="en-US" sz="1200" dirty="0"/>
           </a:p>
+          <a:p>
+            <a:pPr algn="l" marL="342900" indent="-342900">
+              <a:lnSpc>
+                <a:spcPts val="1620"/>
+              </a:lnSpc>
+              <a:spcAft>
+                <a:spcPts val="300"/>
+              </a:spcAft>
+              <a:buSzPct val="100000"/>
+              <a:buChar char="•"/>
+            </a:pPr>
+            <a:r>
+              <a:rPr lang="en-US" sz="1200" b="1" dirty="0">
+                <a:solidFill>
+                  <a:srgbClr val="1C2833"/>
+                </a:solidFill>
+                <a:latin typeface="Arial" pitchFamily="34" charset="0"/>
+                <a:ea typeface="Arial" pitchFamily="34" charset="-122"/>
+                <a:cs typeface="Arial" pitchFamily="34" charset="-120"/>
+              </a:rPr>
+              <a:t>May</a:t>
+            </a:r>
+            <a:pPr algn="l" indent="0" marL="0">
+              <a:lnSpc>
+                <a:spcPts val="1620"/>
+              </a:lnSpc>
+              <a:spcAft>
+                <a:spcPts val="300"/>
+              </a:spcAft>
+              <a:buNone/>
+            </a:pPr>
+            <a:r>
+              <a:rPr lang="en-US" sz="1200" dirty="0">
+                <a:solidFill>
+                  <a:srgbClr val="1C2833"/>
+                </a:solidFill>
+                <a:latin typeface="Arial" pitchFamily="34" charset="0"/>
+                <a:ea typeface="Arial" pitchFamily="34" charset="-122"/>
+                <a:cs typeface="Arial" pitchFamily="34" charset="-120"/>
+              </a:rPr>
+              <a:t> — ~13 h 30 min</a:t>
+            </a:r>
+            <a:endParaRPr lang="en-US" sz="1200" dirty="0"/>
+          </a:p>
+          <a:p>
+            <a:pPr algn="l" marL="342900" indent="-342900">
+              <a:lnSpc>
+                <a:spcPts val="1620"/>
+              </a:lnSpc>
+              <a:spcAft>
+                <a:spcPts val="300"/>
+              </a:spcAft>
+              <a:buSzPct val="100000"/>
+              <a:buChar char="•"/>
+            </a:pPr>
+            <a:r>
+              <a:rPr lang="en-US" sz="1200" b="1" dirty="0">
+                <a:solidFill>
+                  <a:srgbClr val="1C2833"/>
+                </a:solidFill>
+                <a:latin typeface="Arial" pitchFamily="34" charset="0"/>
+                <a:ea typeface="Arial" pitchFamily="34" charset="-122"/>
+                <a:cs typeface="Arial" pitchFamily="34" charset="-120"/>
+              </a:rPr>
+              <a:t>Jun</a:t>
+            </a:r>
+            <a:pPr algn="l" indent="0" marL="0">
+              <a:lnSpc>
+                <a:spcPts val="1620"/>
+              </a:lnSpc>
+              <a:spcAft>
+                <a:spcPts val="300"/>
+              </a:spcAft>
+              <a:buNone/>
+            </a:pPr>
+            <a:r>
+              <a:rPr lang="en-US" sz="1200" dirty="0">
+                <a:solidFill>
+                  <a:srgbClr val="1C2833"/>
+                </a:solidFill>
+                <a:latin typeface="Arial" pitchFamily="34" charset="0"/>
+                <a:ea typeface="Arial" pitchFamily="34" charset="-122"/>
+                <a:cs typeface="Arial" pitchFamily="34" charset="-120"/>
+              </a:rPr>
+              <a:t> — ~13 h 50 min</a:t>
+            </a:r>
+            <a:endParaRPr lang="en-US" sz="1200" dirty="0"/>
+          </a:p>
+          <a:p>
+            <a:pPr algn="l" marL="342900" indent="-342900">
+              <a:lnSpc>
+                <a:spcPts val="1620"/>
+              </a:lnSpc>
+              <a:spcAft>
+                <a:spcPts val="300"/>
+              </a:spcAft>
+              <a:buSzPct val="100000"/>
+              <a:buChar char="•"/>
+            </a:pPr>
+            <a:r>
+              <a:rPr lang="en-US" sz="1200" b="1" dirty="0">
+                <a:solidFill>
+                  <a:srgbClr val="1C2833"/>
+                </a:solidFill>
+                <a:latin typeface="Arial" pitchFamily="34" charset="0"/>
+                <a:ea typeface="Arial" pitchFamily="34" charset="-122"/>
+                <a:cs typeface="Arial" pitchFamily="34" charset="-120"/>
+              </a:rPr>
+              <a:t>Jul</a:t>
+            </a:r>
+            <a:pPr algn="l" indent="0" marL="0">
+              <a:lnSpc>
+                <a:spcPts val="1620"/>
+              </a:lnSpc>
+              <a:spcAft>
+                <a:spcPts val="300"/>
+              </a:spcAft>
+              <a:buNone/>
+            </a:pPr>
+            <a:r>
+              <a:rPr lang="en-US" sz="1200" dirty="0">
+                <a:solidFill>
+                  <a:srgbClr val="1C2833"/>
+                </a:solidFill>
+                <a:latin typeface="Arial" pitchFamily="34" charset="0"/>
+                <a:ea typeface="Arial" pitchFamily="34" charset="-122"/>
+                <a:cs typeface="Arial" pitchFamily="34" charset="-120"/>
+              </a:rPr>
+              <a:t> — ~13 h 40 min</a:t>
+            </a:r>
+            <a:endParaRPr lang="en-US" sz="1200" dirty="0"/>
+          </a:p>
+          <a:p>
+            <a:pPr algn="l" marL="342900" indent="-342900">
+              <a:lnSpc>
+                <a:spcPts val="1620"/>
+              </a:lnSpc>
+              <a:spcAft>
+                <a:spcPts val="300"/>
+              </a:spcAft>
+              <a:buSzPct val="100000"/>
+              <a:buChar char="•"/>
+            </a:pPr>
+            <a:r>
+              <a:rPr lang="en-US" sz="1200" b="1" dirty="0">
+                <a:solidFill>
+                  <a:srgbClr val="1C2833"/>
+                </a:solidFill>
+                <a:latin typeface="Arial" pitchFamily="34" charset="0"/>
+                <a:ea typeface="Arial" pitchFamily="34" charset="-122"/>
+                <a:cs typeface="Arial" pitchFamily="34" charset="-120"/>
+              </a:rPr>
+              <a:t>Aug</a:t>
+            </a:r>
+            <a:pPr algn="l" indent="0" marL="0">
+              <a:lnSpc>
+                <a:spcPts val="1620"/>
+              </a:lnSpc>
+              <a:spcAft>
+                <a:spcPts val="300"/>
+              </a:spcAft>
+              <a:buNone/>
+            </a:pPr>
+            <a:r>
+              <a:rPr lang="en-US" sz="1200" dirty="0">
+                <a:solidFill>
+                  <a:srgbClr val="1C2833"/>
+                </a:solidFill>
+                <a:latin typeface="Arial" pitchFamily="34" charset="0"/>
+                <a:ea typeface="Arial" pitchFamily="34" charset="-122"/>
+                <a:cs typeface="Arial" pitchFamily="34" charset="-120"/>
+              </a:rPr>
+              <a:t> — ~13 h 00 min</a:t>
+            </a:r>
+            <a:endParaRPr lang="en-US" sz="1200" dirty="0"/>
+          </a:p>
+          <a:p>
+            <a:pPr algn="l" marL="342900" indent="-342900">
+              <a:lnSpc>
+                <a:spcPts val="1620"/>
+              </a:lnSpc>
+              <a:spcAft>
+                <a:spcPts val="300"/>
+              </a:spcAft>
+              <a:buSzPct val="100000"/>
+              <a:buChar char="•"/>
+            </a:pPr>
+            <a:r>
+              <a:rPr lang="en-US" sz="1200" b="1" dirty="0">
+                <a:solidFill>
+                  <a:srgbClr val="1C2833"/>
+                </a:solidFill>
+                <a:latin typeface="Arial" pitchFamily="34" charset="0"/>
+                <a:ea typeface="Arial" pitchFamily="34" charset="-122"/>
+                <a:cs typeface="Arial" pitchFamily="34" charset="-120"/>
+              </a:rPr>
+              <a:t>Sep</a:t>
+            </a:r>
+            <a:pPr algn="l" indent="0" marL="0">
+              <a:lnSpc>
+                <a:spcPts val="1620"/>
+              </a:lnSpc>
+              <a:spcAft>
+                <a:spcPts val="300"/>
+              </a:spcAft>
+              <a:buNone/>
+            </a:pPr>
+            <a:r>
+              <a:rPr lang="en-US" sz="1200" dirty="0">
+                <a:solidFill>
+                  <a:srgbClr val="1C2833"/>
+                </a:solidFill>
+                <a:latin typeface="Arial" pitchFamily="34" charset="0"/>
+                <a:ea typeface="Arial" pitchFamily="34" charset="-122"/>
+                <a:cs typeface="Arial" pitchFamily="34" charset="-120"/>
+              </a:rPr>
+              <a:t> — ~12 h 10 min</a:t>
+            </a:r>
+            <a:endParaRPr lang="en-US" sz="1200" dirty="0"/>
+          </a:p>
+          <a:p>
+            <a:pPr algn="l" marL="342900" indent="-342900">
+              <a:lnSpc>
+                <a:spcPts val="1620"/>
+              </a:lnSpc>
+              <a:spcAft>
+                <a:spcPts val="300"/>
+              </a:spcAft>
+              <a:buSzPct val="100000"/>
+              <a:buChar char="•"/>
+            </a:pPr>
+            <a:r>
+              <a:rPr lang="en-US" sz="1200" b="1" dirty="0">
+                <a:solidFill>
+                  <a:srgbClr val="1C2833"/>
+                </a:solidFill>
+                <a:latin typeface="Arial" pitchFamily="34" charset="0"/>
+                <a:ea typeface="Arial" pitchFamily="34" charset="-122"/>
+                <a:cs typeface="Arial" pitchFamily="34" charset="-120"/>
+              </a:rPr>
+              <a:t>Oct</a:t>
+            </a:r>
+            <a:pPr algn="l" indent="0" marL="0">
+              <a:lnSpc>
+                <a:spcPts val="1620"/>
+              </a:lnSpc>
+              <a:spcAft>
+                <a:spcPts val="300"/>
+              </a:spcAft>
+              <a:buNone/>
+            </a:pPr>
+            <a:r>
+              <a:rPr lang="en-US" sz="1200" dirty="0">
+                <a:solidFill>
+                  <a:srgbClr val="1C2833"/>
+                </a:solidFill>
+                <a:latin typeface="Arial" pitchFamily="34" charset="0"/>
+                <a:ea typeface="Arial" pitchFamily="34" charset="-122"/>
+                <a:cs typeface="Arial" pitchFamily="34" charset="-120"/>
+              </a:rPr>
+              <a:t> — ~11 h 25 min</a:t>
+            </a:r>
+            <a:endParaRPr lang="en-US" sz="1200" dirty="0"/>
+          </a:p>
+          <a:p>
+            <a:pPr algn="l" marL="342900" indent="-342900">
+              <a:lnSpc>
+                <a:spcPts val="1620"/>
+              </a:lnSpc>
+              <a:spcAft>
+                <a:spcPts val="300"/>
+              </a:spcAft>
+              <a:buSzPct val="100000"/>
+              <a:buChar char="•"/>
+            </a:pPr>
+            <a:r>
+              <a:rPr lang="en-US" sz="1200" b="1" dirty="0">
+                <a:solidFill>
+                  <a:srgbClr val="1C2833"/>
+                </a:solidFill>
+                <a:latin typeface="Arial" pitchFamily="34" charset="0"/>
+                <a:ea typeface="Arial" pitchFamily="34" charset="-122"/>
+                <a:cs typeface="Arial" pitchFamily="34" charset="-120"/>
+              </a:rPr>
+              <a:t>Nov</a:t>
+            </a:r>
+            <a:pPr algn="l" indent="0" marL="0">
+              <a:lnSpc>
+                <a:spcPts val="1620"/>
+              </a:lnSpc>
+              <a:spcAft>
+                <a:spcPts val="300"/>
+              </a:spcAft>
+              <a:buNone/>
+            </a:pPr>
+            <a:r>
+              <a:rPr lang="en-US" sz="1200" dirty="0">
+                <a:solidFill>
+                  <a:srgbClr val="1C2833"/>
+                </a:solidFill>
+                <a:latin typeface="Arial" pitchFamily="34" charset="0"/>
+                <a:ea typeface="Arial" pitchFamily="34" charset="-122"/>
+                <a:cs typeface="Arial" pitchFamily="34" charset="-120"/>
+              </a:rPr>
+              <a:t> — ~10 h 40 min</a:t>
+            </a:r>
+            <a:endParaRPr lang="en-US" sz="1200" dirty="0"/>
+          </a:p>
+          <a:p>
+            <a:pPr algn="l" marL="342900" indent="-342900">
+              <a:lnSpc>
+                <a:spcPts val="1620"/>
+              </a:lnSpc>
+              <a:spcAft>
+                <a:spcPts val="300"/>
+              </a:spcAft>
+              <a:buSzPct val="100000"/>
+              <a:buChar char="•"/>
+            </a:pPr>
+            <a:r>
+              <a:rPr lang="en-US" sz="1200" b="1" dirty="0">
+                <a:solidFill>
+                  <a:srgbClr val="1C2833"/>
+                </a:solidFill>
+                <a:latin typeface="Arial" pitchFamily="34" charset="0"/>
+                <a:ea typeface="Arial" pitchFamily="34" charset="-122"/>
+                <a:cs typeface="Arial" pitchFamily="34" charset="-120"/>
+              </a:rPr>
+              <a:t>Dec</a:t>
+            </a:r>
+            <a:pPr algn="l" indent="0" marL="0">
+              <a:lnSpc>
+                <a:spcPts val="1620"/>
+              </a:lnSpc>
+              <a:spcAft>
+                <a:spcPts val="300"/>
+              </a:spcAft>
+              <a:buNone/>
+            </a:pPr>
+            <a:r>
+              <a:rPr lang="en-US" sz="1200" dirty="0">
+                <a:solidFill>
+                  <a:srgbClr val="1C2833"/>
+                </a:solidFill>
+                <a:latin typeface="Arial" pitchFamily="34" charset="0"/>
+                <a:ea typeface="Arial" pitchFamily="34" charset="-122"/>
+                <a:cs typeface="Arial" pitchFamily="34" charset="-120"/>
+              </a:rPr>
+              <a:t> — ~10 h 15 min</a:t>
+            </a:r>
+            <a:endParaRPr lang="en-US" sz="1200" dirty="0"/>
+          </a:p>
         </p:txBody>
       </p:sp>
       <p:sp>
@@ -6250,7 +6932,7 @@
         </p:nvSpPr>
         <p:spPr>
           <a:xfrm>
-            <a:off x="406301" y="6404818"/>
+            <a:off x="406301" y="5431482"/>
             <a:ext cx="8498026" cy="213271"/>
           </a:xfrm>
           <a:prstGeom prst="rect">
@@ -6276,15 +6958,15 @@
               <a:buNone/>
             </a:pPr>
             <a:r>
-              <a:rPr lang="en-US" sz="1200" b="1" dirty="0">
-                <a:solidFill>
-                  <a:srgbClr val="1C2833"/>
-                </a:solidFill>
-                <a:latin typeface="Arial" pitchFamily="34" charset="0"/>
-                <a:ea typeface="Arial" pitchFamily="34" charset="-122"/>
-                <a:cs typeface="Arial" pitchFamily="34" charset="-120"/>
-              </a:rPr>
-              <a:t>Discussion (last 3 min):</a:t>
+              <a:rPr lang="en-US" sz="1200" dirty="0">
+                <a:solidFill>
+                  <a:srgbClr val="1C2833"/>
+                </a:solidFill>
+                <a:latin typeface="Arial" pitchFamily="34" charset="0"/>
+                <a:ea typeface="Arial" pitchFamily="34" charset="-122"/>
+                <a:cs typeface="Arial" pitchFamily="34" charset="-120"/>
+              </a:rPr>
+              <a:t>Students plot the points, connect them, and mark:</a:t>
             </a:r>
             <a:endParaRPr lang="en-US" sz="1200" dirty="0"/>
           </a:p>
@@ -6298,8 +6980,8 @@
         </p:nvSpPr>
         <p:spPr>
           <a:xfrm>
-            <a:off x="406301" y="6694289"/>
-            <a:ext cx="8498026" cy="853083"/>
+            <a:off x="406301" y="5720953"/>
+            <a:ext cx="8498026" cy="426541"/>
           </a:xfrm>
           <a:prstGeom prst="rect">
             <a:avLst/>
@@ -6332,6 +7014,240 @@
                 <a:ea typeface="Arial" pitchFamily="34" charset="-122"/>
                 <a:cs typeface="Arial" pitchFamily="34" charset="-120"/>
               </a:rPr>
+              <a:t>– The </a:t>
+            </a:r>
+            <a:pPr algn="l" indent="0" marL="0">
+              <a:lnSpc>
+                <a:spcPts val="1680"/>
+              </a:lnSpc>
+              <a:spcBef>
+                <a:spcPts val="300"/>
+              </a:spcBef>
+              <a:spcAft>
+                <a:spcPts val="300"/>
+              </a:spcAft>
+              <a:buNone/>
+            </a:pPr>
+            <a:r>
+              <a:rPr lang="en-US" sz="1200" b="1" dirty="0">
+                <a:solidFill>
+                  <a:srgbClr val="1C2833"/>
+                </a:solidFill>
+                <a:latin typeface="Arial" pitchFamily="34" charset="0"/>
+                <a:ea typeface="Arial" pitchFamily="34" charset="-122"/>
+                <a:cs typeface="Arial" pitchFamily="34" charset="-120"/>
+              </a:rPr>
+              <a:t>two highest points</a:t>
+            </a:r>
+            <a:pPr algn="l" indent="0" marL="0">
+              <a:lnSpc>
+                <a:spcPts val="1680"/>
+              </a:lnSpc>
+              <a:spcBef>
+                <a:spcPts val="300"/>
+              </a:spcBef>
+              <a:spcAft>
+                <a:spcPts val="300"/>
+              </a:spcAft>
+              <a:buNone/>
+            </a:pPr>
+            <a:r>
+              <a:rPr lang="en-US" sz="1200" dirty="0">
+                <a:solidFill>
+                  <a:srgbClr val="1C2833"/>
+                </a:solidFill>
+                <a:latin typeface="Arial" pitchFamily="34" charset="0"/>
+                <a:ea typeface="Arial" pitchFamily="34" charset="-122"/>
+                <a:cs typeface="Arial" pitchFamily="34" charset="-120"/>
+              </a:rPr>
+              <a:t> (close together in June) — summer solstice. – The </a:t>
+            </a:r>
+            <a:pPr algn="l" indent="0" marL="0">
+              <a:lnSpc>
+                <a:spcPts val="1680"/>
+              </a:lnSpc>
+              <a:spcBef>
+                <a:spcPts val="300"/>
+              </a:spcBef>
+              <a:spcAft>
+                <a:spcPts val="300"/>
+              </a:spcAft>
+              <a:buNone/>
+            </a:pPr>
+            <a:r>
+              <a:rPr lang="en-US" sz="1200" b="1" dirty="0">
+                <a:solidFill>
+                  <a:srgbClr val="1C2833"/>
+                </a:solidFill>
+                <a:latin typeface="Arial" pitchFamily="34" charset="0"/>
+                <a:ea typeface="Arial" pitchFamily="34" charset="-122"/>
+                <a:cs typeface="Arial" pitchFamily="34" charset="-120"/>
+              </a:rPr>
+              <a:t>two lowest points</a:t>
+            </a:r>
+            <a:pPr algn="l" indent="0" marL="0">
+              <a:lnSpc>
+                <a:spcPts val="1680"/>
+              </a:lnSpc>
+              <a:spcBef>
+                <a:spcPts val="300"/>
+              </a:spcBef>
+              <a:spcAft>
+                <a:spcPts val="300"/>
+              </a:spcAft>
+              <a:buNone/>
+            </a:pPr>
+            <a:r>
+              <a:rPr lang="en-US" sz="1200" dirty="0">
+                <a:solidFill>
+                  <a:srgbClr val="1C2833"/>
+                </a:solidFill>
+                <a:latin typeface="Arial" pitchFamily="34" charset="0"/>
+                <a:ea typeface="Arial" pitchFamily="34" charset="-122"/>
+                <a:cs typeface="Arial" pitchFamily="34" charset="-120"/>
+              </a:rPr>
+              <a:t> (close together in December) — winter solstice. – The </a:t>
+            </a:r>
+            <a:pPr algn="l" indent="0" marL="0">
+              <a:lnSpc>
+                <a:spcPts val="1680"/>
+              </a:lnSpc>
+              <a:spcBef>
+                <a:spcPts val="300"/>
+              </a:spcBef>
+              <a:spcAft>
+                <a:spcPts val="300"/>
+              </a:spcAft>
+              <a:buNone/>
+            </a:pPr>
+            <a:r>
+              <a:rPr lang="en-US" sz="1200" b="1" dirty="0">
+                <a:solidFill>
+                  <a:srgbClr val="1C2833"/>
+                </a:solidFill>
+                <a:latin typeface="Arial" pitchFamily="34" charset="0"/>
+                <a:ea typeface="Arial" pitchFamily="34" charset="-122"/>
+                <a:cs typeface="Arial" pitchFamily="34" charset="-120"/>
+              </a:rPr>
+              <a:t>two crossings of the 12-hour line</a:t>
+            </a:r>
+            <a:pPr algn="l" indent="0" marL="0">
+              <a:lnSpc>
+                <a:spcPts val="1680"/>
+              </a:lnSpc>
+              <a:spcBef>
+                <a:spcPts val="300"/>
+              </a:spcBef>
+              <a:spcAft>
+                <a:spcPts val="300"/>
+              </a:spcAft>
+              <a:buNone/>
+            </a:pPr>
+            <a:r>
+              <a:rPr lang="en-US" sz="1200" dirty="0">
+                <a:solidFill>
+                  <a:srgbClr val="1C2833"/>
+                </a:solidFill>
+                <a:latin typeface="Arial" pitchFamily="34" charset="0"/>
+                <a:ea typeface="Arial" pitchFamily="34" charset="-122"/>
+                <a:cs typeface="Arial" pitchFamily="34" charset="-120"/>
+              </a:rPr>
+              <a:t> — the equinoxes.</a:t>
+            </a:r>
+            <a:endParaRPr lang="en-US" sz="1200" dirty="0"/>
+          </a:p>
+        </p:txBody>
+      </p:sp>
+      <p:sp>
+        <p:nvSpPr>
+          <p:cNvPr id="11" name="Text 9"/>
+          <p:cNvSpPr/>
+          <p:nvPr/>
+        </p:nvSpPr>
+        <p:spPr>
+          <a:xfrm>
+            <a:off x="406301" y="6223695"/>
+            <a:ext cx="8498026" cy="213271"/>
+          </a:xfrm>
+          <a:prstGeom prst="rect">
+            <a:avLst/>
+          </a:prstGeom>
+          <a:noFill/>
+          <a:ln/>
+        </p:spPr>
+        <p:txBody>
+          <a:bodyPr wrap="square" lIns="0" tIns="0" rIns="0" bIns="0" rtlCol="0" anchor="t"/>
+          <a:lstStyle/>
+          <a:p>
+            <a:pPr algn="l" indent="0" marL="0">
+              <a:lnSpc>
+                <a:spcPts val="1680"/>
+              </a:lnSpc>
+              <a:spcBef>
+                <a:spcPts val="300"/>
+              </a:spcBef>
+              <a:spcAft>
+                <a:spcPts val="300"/>
+              </a:spcAft>
+              <a:buNone/>
+            </a:pPr>
+            <a:r>
+              <a:rPr lang="en-US" sz="1200" b="1" dirty="0">
+                <a:solidFill>
+                  <a:srgbClr val="1C2833"/>
+                </a:solidFill>
+                <a:latin typeface="Arial" pitchFamily="34" charset="0"/>
+                <a:ea typeface="Arial" pitchFamily="34" charset="-122"/>
+                <a:cs typeface="Arial" pitchFamily="34" charset="-120"/>
+              </a:rPr>
+              <a:t>Discussion (last 3 min):</a:t>
+            </a:r>
+            <a:endParaRPr lang="en-US" sz="1200" dirty="0"/>
+          </a:p>
+        </p:txBody>
+      </p:sp>
+      <p:sp>
+        <p:nvSpPr>
+          <p:cNvPr id="12" name="Text 10"/>
+          <p:cNvSpPr/>
+          <p:nvPr/>
+        </p:nvSpPr>
+        <p:spPr>
+          <a:xfrm>
+            <a:off x="406301" y="6513165"/>
+            <a:ext cx="8498026" cy="853083"/>
+          </a:xfrm>
+          <a:prstGeom prst="rect">
+            <a:avLst/>
+          </a:prstGeom>
+          <a:noFill/>
+          <a:ln/>
+        </p:spPr>
+        <p:txBody>
+          <a:bodyPr wrap="square" lIns="0" tIns="0" rIns="0" bIns="0" rtlCol="0" anchor="t"/>
+          <a:lstStyle/>
+          <a:p>
+            <a:pPr algn="l" indent="0" marL="0">
+              <a:lnSpc>
+                <a:spcPts val="1680"/>
+              </a:lnSpc>
+              <a:spcBef>
+                <a:spcPts val="300"/>
+              </a:spcBef>
+              <a:spcAft>
+                <a:spcPts val="300"/>
+              </a:spcAft>
+              <a:buNone/>
+            </a:pPr>
+            <a:r>
+              <a:rPr lang="en-US" sz="1200" dirty="0">
+                <a:solidFill>
+                  <a:srgbClr val="1C2833"/>
+                </a:solidFill>
+                <a:latin typeface="Arial" pitchFamily="34" charset="0"/>
+                <a:ea typeface="Arial" pitchFamily="34" charset="-122"/>
+                <a:cs typeface="Arial" pitchFamily="34" charset="-120"/>
+              </a:rPr>
               <a:t>– Why is the difference between longest and shortest day only ~3.5 hours in Delhi, but ~16 hours in London (latitude 51° N)? </a:t>
             </a:r>
             <a:pPr algn="l" indent="0" marL="0">
@@ -6455,13 +7371,13 @@
       </p:sp>
       <p:sp>
         <p:nvSpPr>
-          <p:cNvPr id="11" name="Text 9"/>
-          <p:cNvSpPr/>
-          <p:nvPr/>
-        </p:nvSpPr>
-        <p:spPr>
-          <a:xfrm>
-            <a:off x="406301" y="7699772"/>
+          <p:cNvPr id="13" name="Text 11"/>
+          <p:cNvSpPr/>
+          <p:nvPr/>
+        </p:nvSpPr>
+        <p:spPr>
+          <a:xfrm>
+            <a:off x="406301" y="7518648"/>
             <a:ext cx="8498026" cy="213271"/>
           </a:xfrm>
           <a:prstGeom prst="rect">
